--- a/slides/pptx/week09.pptx
+++ b/slides/pptx/week09.pptx
@@ -682,7 +682,7 @@
           <a:p>
             <a:r>
               <a:rPr lang="en-US" dirty="0"/>
-              <a:t>Same areas as the W7 mock — no surprises. Extra challenges available in exams/item-bank.md (CTF pool) if you rotate.</a:t>
+              <a:t>Same targets as the W7 mock, weighted unevenly — don't present these as equal-weight. DVWA appears in this week's own README but isn't deployed anywhere in ctf.md's target list — correct it here so no one hunts for a container that isn't running. Juice Shop is different: ctf.md's own Targets line does name it as an "(or OWASP Juice Shop)" alternative for the XSS slot, but no flag is planted there (seed_flags.py / the answer key only seed this course's own apps) — so it's not actually part of the graded surface either, just an unused alternate. Point students at the course's own week05 app. Extra challenges available in exams/item-bank.md (CTF pool) if you rotate.</a:t>
             </a:r>
             <a:endParaRPr lang="en-US" dirty="0"/>
           </a:p>
@@ -770,7 +770,7 @@
           <a:p>
             <a:r>
               <a:rPr lang="en-US" dirty="0"/>
-              <a:t>Stress: attack only provided targets; per-challenge submit flag + 1-line method + mitigation (the method note earns partial credit + supports grading). Then start the clock.</a:t>
+              <a:t>Stress: attack only provided targets; three separate required fields, not one combined note — the mitigation line is graded separately from the method. Then start the clock.</a:t>
             </a:r>
             <a:endParaRPr lang="en-US" dirty="0"/>
           </a:p>
@@ -1544,7 +1544,9 @@
           <a:ln/>
         </p:spPr>
         <p:txBody>
-          <a:bodyPr wrap="square" lIns="0" tIns="0" rIns="0" bIns="0" rtlCol="0" anchor="t"/>
+          <a:bodyPr wrap="square" lIns="0" tIns="0" rIns="0" bIns="0" rtlCol="0" anchor="t">
+            <a:normAutofit/>
+          </a:bodyPr>
           <a:lstStyle/>
           <a:p>
             <a:pPr marL="342900" indent="-342900">
@@ -1790,7 +1792,7 @@
                 <a:ea typeface="Arial" pitchFamily="34" charset="-122"/>
                 <a:cs typeface="Arial" pitchFamily="34" charset="-120"/>
               </a:rPr>
-              <a:t>Challenge areas</a:t>
+              <a:t>Challenge areas — 100 pts, 7 challenges</a:t>
             </a:r>
             <a:endParaRPr lang="en-US" sz="2600" dirty="0"/>
           </a:p>
@@ -1805,11 +1807,11 @@
         <p:spPr>
           <a:xfrm>
             <a:off x="457200" y="1325880"/>
-            <a:ext cx="8229600" cy="1517904"/>
+            <a:ext cx="8229600" cy="1920240"/>
           </a:xfrm>
           <a:prstGeom prst="roundRect">
             <a:avLst>
-              <a:gd name="adj" fmla="val 4819"/>
+              <a:gd name="adj" fmla="val 3810"/>
             </a:avLst>
           </a:prstGeom>
           <a:solidFill>
@@ -1834,7 +1836,7 @@
         <p:spPr>
           <a:xfrm>
             <a:off x="731520" y="1435608"/>
-            <a:ext cx="7680960" cy="1298448"/>
+            <a:ext cx="7680960" cy="1700784"/>
           </a:xfrm>
           <a:prstGeom prst="rect">
             <a:avLst/>
@@ -1843,7 +1845,9 @@
           <a:ln/>
         </p:spPr>
         <p:txBody>
-          <a:bodyPr wrap="square" lIns="0" tIns="0" rIns="0" bIns="0" rtlCol="0" anchor="t"/>
+          <a:bodyPr wrap="square" lIns="0" tIns="0" rIns="0" bIns="0" rtlCol="0" anchor="t">
+            <a:normAutofit/>
+          </a:bodyPr>
           <a:lstStyle/>
           <a:p>
             <a:pPr marL="342900" indent="-342900">
@@ -1862,7 +1866,7 @@
                 <a:ea typeface="Calibri" pitchFamily="34" charset="-122"/>
                 <a:cs typeface="Calibri" pitchFamily="34" charset="-120"/>
               </a:rPr>
-              <a:t>Injection — SQLi / command (DVWA / Juice Shop)</a:t>
+              <a:t>Injection (30): SQLi + command injection — against this course's own apps, not DVWA (not deployed anywhere in the exam surface)</a:t>
             </a:r>
             <a:endParaRPr lang="en-US" sz="1400" dirty="0"/>
           </a:p>
@@ -1883,7 +1887,7 @@
                 <a:ea typeface="Calibri" pitchFamily="34" charset="-122"/>
                 <a:cs typeface="Calibri" pitchFamily="34" charset="-120"/>
               </a:rPr>
-              <a:t>XSS — reflected / stored / DOM (Juice Shop)</a:t>
+              <a:t>Auth / access (30): IDOR + weak JWT forgery</a:t>
             </a:r>
             <a:endParaRPr lang="en-US" sz="1400" dirty="0"/>
           </a:p>
@@ -1904,7 +1908,7 @@
                 <a:ea typeface="Calibri" pitchFamily="34" charset="-122"/>
                 <a:cs typeface="Calibri" pitchFamily="34" charset="-120"/>
               </a:rPr>
-              <a:t>Auth / access — IDOR, weak JWT forgery</a:t>
+              <a:t>Crypto (25): crack a weak hash / break an ECB oracle</a:t>
             </a:r>
             <a:endParaRPr lang="en-US" sz="1400" dirty="0"/>
           </a:p>
@@ -1925,7 +1929,7 @@
                 <a:ea typeface="Calibri" pitchFamily="34" charset="-122"/>
                 <a:cs typeface="Calibri" pitchFamily="34" charset="-120"/>
               </a:rPr>
-              <a:t>Crypto — crack a weak hash / break an ECB oracle</a:t>
+              <a:t>XSS (15): one stored-XSS challenge on this course's own week05 app — not reflected/DOM this time</a:t>
             </a:r>
             <a:endParaRPr lang="en-US" sz="1400" dirty="0"/>
           </a:p>
@@ -2163,7 +2167,9 @@
           <a:ln/>
         </p:spPr>
         <p:txBody>
-          <a:bodyPr wrap="square" lIns="0" tIns="0" rIns="0" bIns="0" rtlCol="0" anchor="t"/>
+          <a:bodyPr wrap="square" lIns="0" tIns="0" rIns="0" bIns="0" rtlCol="0" anchor="t">
+            <a:normAutofit/>
+          </a:bodyPr>
           <a:lstStyle/>
           <a:p>
             <a:pPr marL="342900" indent="-342900">
@@ -2203,7 +2209,7 @@
                 <a:ea typeface="Calibri" pitchFamily="34" charset="-122"/>
                 <a:cs typeface="Calibri" pitchFamily="34" charset="-120"/>
               </a:rPr>
-              <a:t>Submit flags + a short note on method per challenge</a:t>
+              <a:t>Submit 3 fields per challenge: flag/proof, payload/command, one-line mitigation</a:t>
             </a:r>
             <a:endParaRPr lang="en-US" sz="1400" dirty="0"/>
           </a:p>
@@ -2397,7 +2403,7 @@
                 <a:ea typeface="Calibri" pitchFamily="34" charset="-122"/>
                 <a:cs typeface="Calibri" pitchFamily="34" charset="-120"/>
               </a:rPr>
-              <a:t>Next: Unit C — Systems &amp; Modern Stack (Week 10, API security)</a:t>
+              <a:t>Next: Week 10, API security</a:t>
             </a:r>
             <a:endParaRPr lang="en-US" sz="1800" dirty="0"/>
           </a:p>

--- a/slides/pptx/week09.pptx
+++ b/slides/pptx/week09.pptx
@@ -682,7 +682,7 @@
           <a:p>
             <a:r>
               <a:rPr lang="en-US" dirty="0"/>
-              <a:t>Same targets as the W7 mock, weighted unevenly — don't present these as equal-weight. DVWA appears in this week's own README but isn't deployed anywhere in ctf.md's target list — correct it here so no one hunts for a container that isn't running. Juice Shop is different: ctf.md's own Targets line does name it as an "(or OWASP Juice Shop)" alternative for the XSS slot, but no flag is planted there (seed_flags.py / the answer key only seed this course's own apps) — so it's not actually part of the graded surface either, just an unused alternate. Point students at the course's own week05 app. Extra challenges available in exams/item-bank.md (CTF pool) if you rotate.</a:t>
+              <a:t>Same targets as the W7 mock, weighted unevenly — don't present these as equal-weight. DVWA appears in this week's own README but isn't deployed anywhere in ctf.md's target list — correct it here so no one hunts for a container that isn't running. Juice Shop is similar: ctf.md's Targets line used to list it as an "(or OWASP Juice Shop)" alternative for the XSS slot, but no flag was ever planted there (seed_flags.py / the answer key only seed this course's own apps) — so it wasn't actually part of the graded surface, and that line has been removed from ctf.md. If a student asks, week05's app is the only XSS target; Juice Shop earns no credit. Extra challenges available in exams/item-bank.md (CTF pool) if you rotate.</a:t>
             </a:r>
             <a:endParaRPr lang="en-US" dirty="0"/>
           </a:p>
@@ -1800,43 +1800,14 @@
       </p:sp>
       <p:sp>
         <p:nvSpPr>
-          <p:cNvPr id="5" name="Shape 2"/>
+          <p:cNvPr id="5" name="Text 2"/>
           <p:cNvSpPr/>
           <p:nvPr/>
         </p:nvSpPr>
         <p:spPr>
           <a:xfrm>
-            <a:off x="457200" y="1325880"/>
-            <a:ext cx="8229600" cy="1920240"/>
-          </a:xfrm>
-          <a:prstGeom prst="roundRect">
-            <a:avLst>
-              <a:gd name="adj" fmla="val 3810"/>
-            </a:avLst>
-          </a:prstGeom>
-          <a:solidFill>
-            <a:srgbClr val="F1F5F9"/>
-          </a:solidFill>
-          <a:ln/>
-          <a:effectLst>
-            <a:outerShdw sx="100000" sy="100000" kx="0" ky="0" algn="bl" rotWithShape="0" blurRad="76200" dist="25400" dir="5400000">
-              <a:srgbClr val="000000">
-                <a:alpha val="12000"/>
-              </a:srgbClr>
-            </a:outerShdw>
-          </a:effectLst>
-        </p:spPr>
-      </p:sp>
-      <p:sp>
-        <p:nvSpPr>
-          <p:cNvPr id="6" name="Text 3"/>
-          <p:cNvSpPr/>
-          <p:nvPr/>
-        </p:nvSpPr>
-        <p:spPr>
-          <a:xfrm>
-            <a:off x="731520" y="1435608"/>
-            <a:ext cx="7680960" cy="1700784"/>
+            <a:off x="548640" y="1325880"/>
+            <a:ext cx="8046720" cy="1920240"/>
           </a:xfrm>
           <a:prstGeom prst="rect">
             <a:avLst/>
@@ -1850,12 +1821,8 @@
           </a:bodyPr>
           <a:lstStyle/>
           <a:p>
-            <a:pPr marL="342900" indent="-342900">
-              <a:spcAft>
-                <a:spcPts val="600"/>
-              </a:spcAft>
-              <a:buSzPct val="100000"/>
-              <a:buChar char="•"/>
+            <a:pPr indent="0" marL="0">
+              <a:buNone/>
             </a:pPr>
             <a:r>
               <a:rPr lang="en-US" sz="1400" dirty="0">
@@ -1866,78 +1833,15 @@
                 <a:ea typeface="Calibri" pitchFamily="34" charset="-122"/>
                 <a:cs typeface="Calibri" pitchFamily="34" charset="-120"/>
               </a:rPr>
-              <a:t>Injection (30): SQLi + command injection — against this course's own apps, not DVWA (not deployed anywhere in the exam surface)</a:t>
+              <a:t>See diagram: Four categories: Injection (30 pts) from Week 4 — Boolean Bypass SQLi and Shell Out command injection, 15 each. Auth and Access Control (30 pts) from Week 6 — Not Your Order IDOR and Forge Ahead JWT forgery, 15 each. Cryptography (25 pts) from Week 3 — Crack It password cracking (15) and Penguin ECB oracle (10). XSS (15 pts) from Week 5 — Pop the Alert, stored only. Not against DVWA or Juice Shop — this course's own apps, the only targets a flag is actually planted on. (web only)</a:t>
             </a:r>
             <a:endParaRPr lang="en-US" sz="1400" dirty="0"/>
           </a:p>
-          <a:p>
-            <a:pPr marL="342900" indent="-342900">
-              <a:spcAft>
-                <a:spcPts val="600"/>
-              </a:spcAft>
-              <a:buSzPct val="100000"/>
-              <a:buChar char="•"/>
-            </a:pPr>
-            <a:r>
-              <a:rPr lang="en-US" sz="1400" dirty="0">
-                <a:solidFill>
-                  <a:srgbClr val="1F2937"/>
-                </a:solidFill>
-                <a:latin typeface="Calibri" pitchFamily="34" charset="0"/>
-                <a:ea typeface="Calibri" pitchFamily="34" charset="-122"/>
-                <a:cs typeface="Calibri" pitchFamily="34" charset="-120"/>
-              </a:rPr>
-              <a:t>Auth / access (30): IDOR + weak JWT forgery</a:t>
-            </a:r>
-            <a:endParaRPr lang="en-US" sz="1400" dirty="0"/>
-          </a:p>
-          <a:p>
-            <a:pPr marL="342900" indent="-342900">
-              <a:spcAft>
-                <a:spcPts val="600"/>
-              </a:spcAft>
-              <a:buSzPct val="100000"/>
-              <a:buChar char="•"/>
-            </a:pPr>
-            <a:r>
-              <a:rPr lang="en-US" sz="1400" dirty="0">
-                <a:solidFill>
-                  <a:srgbClr val="1F2937"/>
-                </a:solidFill>
-                <a:latin typeface="Calibri" pitchFamily="34" charset="0"/>
-                <a:ea typeface="Calibri" pitchFamily="34" charset="-122"/>
-                <a:cs typeface="Calibri" pitchFamily="34" charset="-120"/>
-              </a:rPr>
-              <a:t>Crypto (25): crack a weak hash / break an ECB oracle</a:t>
-            </a:r>
-            <a:endParaRPr lang="en-US" sz="1400" dirty="0"/>
-          </a:p>
-          <a:p>
-            <a:pPr marL="342900" indent="-342900">
-              <a:spcAft>
-                <a:spcPts val="600"/>
-              </a:spcAft>
-              <a:buSzPct val="100000"/>
-              <a:buChar char="•"/>
-            </a:pPr>
-            <a:r>
-              <a:rPr lang="en-US" sz="1400" dirty="0">
-                <a:solidFill>
-                  <a:srgbClr val="1F2937"/>
-                </a:solidFill>
-                <a:latin typeface="Calibri" pitchFamily="34" charset="0"/>
-                <a:ea typeface="Calibri" pitchFamily="34" charset="-122"/>
-                <a:cs typeface="Calibri" pitchFamily="34" charset="-120"/>
-              </a:rPr>
-              <a:t>XSS (15): one stored-XSS challenge on this course's own week05 app — not reflected/DOM this time</a:t>
-            </a:r>
-            <a:endParaRPr lang="en-US" sz="1400" dirty="0"/>
-          </a:p>
-        </p:txBody>
-      </p:sp>
-      <p:sp>
-        <p:nvSpPr>
-          <p:cNvPr id="7" name="Text 4"/>
+        </p:txBody>
+      </p:sp>
+      <p:sp>
+        <p:nvSpPr>
+          <p:cNvPr id="6" name="Text 3"/>
           <p:cNvSpPr/>
           <p:nvPr/>
         </p:nvSpPr>
@@ -1976,7 +1880,7 @@
       </p:sp>
       <p:pic>
         <p:nvPicPr>
-          <p:cNvPr id="8" name="Image 1" descr="/Users/pop7/Library/CloudStorage/OneDrive-MonsterConnectCo.,Ltd/Lecture/KOSEN69 - software-security/slides/pptx/assets/logo-small.png">    </p:cNvPr>
+          <p:cNvPr id="7" name="Image 1" descr="/Users/pop7/Library/CloudStorage/OneDrive-MonsterConnectCo.,Ltd/Lecture/KOSEN69 - software-security/slides/pptx/assets/logo-small.png">    </p:cNvPr>
           <p:cNvPicPr>
             <a:picLocks noChangeAspect="1"/>
           </p:cNvPicPr>
